--- a/classes/parte-2-criptografia-aplicada/060-ataques-criptograficos-padding-oracle-y-timing/clase-060-presentacion.pptx
+++ b/classes/parte-2-criptografia-aplicada/060-ataques-criptograficos-padding-oracle-y-timing/clase-060-presentacion.pptx
@@ -17,6 +17,9 @@
     <p:sldId id="265" r:id="rId16"/>
     <p:sldId id="266" r:id="rId17"/>
     <p:sldId id="267" r:id="rId18"/>
+    <p:sldId id="268" r:id="rId19"/>
+    <p:sldId id="269" r:id="rId20"/>
+    <p:sldId id="270" r:id="rId21"/>
   </p:sldIdLst>
   <p:sldSz cx="9144000" cy="6858000" type="screen4x3"/>
   <p:notesSz cx="6858000" cy="9144000"/>
@@ -3198,7 +3201,7 @@
                   <a:srgbClr val="0B3D2E"/>
                 </a:solidFill>
               </a:rPr>
-              <a:t>⚠️ Errores comunes</a:t>
+              <a:t>✍️ Ejercicios</a:t>
             </a:r>
           </a:p>
         </p:txBody>
@@ -3236,67 +3239,82 @@
                   <a:srgbClr val="22282E"/>
                 </a:solidFill>
               </a:rPr>
-              <a:t>•  Mensajes de error distintos para padding vs MAC — Crea un oráculo; unifica errores</a:t>
-            </a:r>
-          </a:p>
-          <a:p>
-            <a:pPr>
-              <a:spcAft>
-                <a:spcPts val="600"/>
-              </a:spcAft>
-            </a:pPr>
-            <a:r>
-              <a:rPr sz="1500">
-                <a:solidFill>
-                  <a:srgbClr val="22282E"/>
-                </a:solidFill>
-              </a:rPr>
-              <a:t>•  Comparación de tags con salida temprana — Timing; usa comparedigest</a:t>
-            </a:r>
-          </a:p>
-          <a:p>
-            <a:pPr>
-              <a:spcAft>
-                <a:spcPts val="600"/>
-              </a:spcAft>
-            </a:pPr>
-            <a:r>
-              <a:rPr sz="1500">
-                <a:solidFill>
-                  <a:srgbClr val="22282E"/>
-                </a:solidFill>
-              </a:rPr>
-              <a:t>•  CBC sin autenticación — Vulnerable a padding oracle; usa AEAD</a:t>
-            </a:r>
-          </a:p>
-          <a:p>
-            <a:pPr>
-              <a:spcAft>
-                <a:spcPts val="600"/>
-              </a:spcAft>
-            </a:pPr>
-            <a:r>
-              <a:rPr sz="1500">
-                <a:solidFill>
-                  <a:srgbClr val="22282E"/>
-                </a:solidFill>
-              </a:rPr>
-              <a:t>•  Logs que revelan la causa del fallo — Fuga; registra sin distinguir para el cliente</a:t>
-            </a:r>
-          </a:p>
-          <a:p>
-            <a:pPr>
-              <a:spcAft>
-                <a:spcPts val="600"/>
-              </a:spcAft>
-            </a:pPr>
-            <a:r>
-              <a:rPr sz="1500">
-                <a:solidFill>
-                  <a:srgbClr val="22282E"/>
-                </a:solidFill>
-              </a:rPr>
-              <a:t>•  Descifrar antes de verificar integridad — Procesas datos manipulables; verifica primero</a:t>
+              <a:t>•  Explica por qué CBC + verificación de padding revela información.</a:t>
+            </a:r>
+          </a:p>
+          <a:p>
+            <a:pPr>
+              <a:spcAft>
+                <a:spcPts val="600"/>
+              </a:spcAft>
+            </a:pPr>
+            <a:r>
+              <a:rPr sz="1500">
+                <a:solidFill>
+                  <a:srgbClr val="22282E"/>
+                </a:solidFill>
+              </a:rPr>
+              <a:t>•  Recupera un bloque con el oráculo de tu laboratorio y describe cada paso.</a:t>
+            </a:r>
+          </a:p>
+          <a:p>
+            <a:pPr>
+              <a:spcAft>
+                <a:spcPts val="600"/>
+              </a:spcAft>
+            </a:pPr>
+            <a:r>
+              <a:rPr sz="1500">
+                <a:solidFill>
+                  <a:srgbClr val="22282E"/>
+                </a:solidFill>
+              </a:rPr>
+              <a:t>•  Demuestra empíricamente una diferencia de timing en una comparación ingenua.</a:t>
+            </a:r>
+          </a:p>
+          <a:p>
+            <a:pPr>
+              <a:spcAft>
+                <a:spcPts val="600"/>
+              </a:spcAft>
+            </a:pPr>
+            <a:r>
+              <a:rPr sz="1500">
+                <a:solidFill>
+                  <a:srgbClr val="22282E"/>
+                </a:solidFill>
+              </a:rPr>
+              <a:t>•  Reescribe el servicio con AEAD y verifica que el ataque falla.</a:t>
+            </a:r>
+          </a:p>
+          <a:p>
+            <a:pPr>
+              <a:spcAft>
+                <a:spcPts val="600"/>
+              </a:spcAft>
+            </a:pPr>
+            <a:r>
+              <a:rPr sz="1500">
+                <a:solidFill>
+                  <a:srgbClr val="22282E"/>
+                </a:solidFill>
+              </a:rPr>
+              <a:t>•  Investiga cómo Lucky 13 explotó timing en el MAC de TLS-CBC.</a:t>
+            </a:r>
+          </a:p>
+          <a:p>
+            <a:pPr>
+              <a:spcAft>
+                <a:spcPts val="600"/>
+              </a:spcAft>
+            </a:pPr>
+            <a:r>
+              <a:rPr sz="1500">
+                <a:solidFill>
+                  <a:srgbClr val="22282E"/>
+                </a:solidFill>
+              </a:rPr>
+              <a:t>•  Propón cómo unificar mensajes de error para no filtrar la causa.</a:t>
             </a:r>
           </a:p>
         </p:txBody>
@@ -3347,7 +3365,7 @@
                   <a:srgbClr val="0B3D2E"/>
                 </a:solidFill>
               </a:rPr>
-              <a:t>❓ Preguntas frecuentes</a:t>
+              <a:t>📝 Reto verificable</a:t>
             </a:r>
           </a:p>
         </p:txBody>
@@ -3385,82 +3403,7 @@
                   <a:srgbClr val="22282E"/>
                 </a:solidFill>
               </a:rPr>
-              <a:t>•  ❓ ¿Basta con "esconder" los mensajes de error?</a:t>
-            </a:r>
-          </a:p>
-          <a:p>
-            <a:pPr>
-              <a:spcAft>
-                <a:spcPts val="600"/>
-              </a:spcAft>
-            </a:pPr>
-            <a:r>
-              <a:rPr sz="1500">
-                <a:solidFill>
-                  <a:srgbClr val="22282E"/>
-                </a:solidFill>
-              </a:rPr>
-              <a:t>•  No; el timing u otros canales siguen filtrando. La solución real es AEAD y tiempo constante, no ocultar síntomas.</a:t>
-            </a:r>
-          </a:p>
-          <a:p>
-            <a:pPr>
-              <a:spcAft>
-                <a:spcPts val="600"/>
-              </a:spcAft>
-            </a:pPr>
-            <a:r>
-              <a:rPr sz="1500">
-                <a:solidFill>
-                  <a:srgbClr val="22282E"/>
-                </a:solidFill>
-              </a:rPr>
-              <a:t>•  ❓ ¿Por qué AEAD elimina el padding oracle?</a:t>
-            </a:r>
-          </a:p>
-          <a:p>
-            <a:pPr>
-              <a:spcAft>
-                <a:spcPts val="600"/>
-              </a:spcAft>
-            </a:pPr>
-            <a:r>
-              <a:rPr sz="1500">
-                <a:solidFill>
-                  <a:srgbClr val="22282E"/>
-                </a:solidFill>
-              </a:rPr>
-              <a:t>•  Porque verifica el tag antes de tocar el padding y falla de forma uniforme, sin revelar validez de relleno.</a:t>
-            </a:r>
-          </a:p>
-          <a:p>
-            <a:pPr>
-              <a:spcAft>
-                <a:spcPts val="600"/>
-              </a:spcAft>
-            </a:pPr>
-            <a:r>
-              <a:rPr sz="1500">
-                <a:solidFill>
-                  <a:srgbClr val="22282E"/>
-                </a:solidFill>
-              </a:rPr>
-              <a:t>•  ❓ ¿Los ataques de timing son realistas por red?</a:t>
-            </a:r>
-          </a:p>
-          <a:p>
-            <a:pPr>
-              <a:spcAft>
-                <a:spcPts val="600"/>
-              </a:spcAft>
-            </a:pPr>
-            <a:r>
-              <a:rPr sz="1500">
-                <a:solidFill>
-                  <a:srgbClr val="22282E"/>
-                </a:solidFill>
-              </a:rPr>
-              <a:t>•  Sí; con suficientes mediciones y estadística se explotan incluso a través de la red (Lucky 13 lo demostró).</a:t>
+              <a:t>•  Toma un oráculo de padding de laboratorio y recupera un texto plano completo sin la clave; luego aplica una mitigación (migrar a AEAD) y demuestra que el mismo ataque ya no recupera nada. Criterio de…</a:t>
             </a:r>
           </a:p>
         </p:txBody>
@@ -3511,7 +3454,7 @@
                   <a:srgbClr val="0B3D2E"/>
                 </a:solidFill>
               </a:rPr>
-              <a:t>🔗 Referencias</a:t>
+              <a:t>⚠️ Errores comunes</a:t>
             </a:r>
           </a:p>
         </p:txBody>
@@ -3549,6 +3492,319 @@
                   <a:srgbClr val="22282E"/>
                 </a:solidFill>
               </a:rPr>
+              <a:t>•  Mensajes de error distintos para padding vs MAC — Crea un oráculo; unifica errores</a:t>
+            </a:r>
+          </a:p>
+          <a:p>
+            <a:pPr>
+              <a:spcAft>
+                <a:spcPts val="600"/>
+              </a:spcAft>
+            </a:pPr>
+            <a:r>
+              <a:rPr sz="1500">
+                <a:solidFill>
+                  <a:srgbClr val="22282E"/>
+                </a:solidFill>
+              </a:rPr>
+              <a:t>•  Comparación de tags con salida temprana — Timing; usa comparedigest</a:t>
+            </a:r>
+          </a:p>
+          <a:p>
+            <a:pPr>
+              <a:spcAft>
+                <a:spcPts val="600"/>
+              </a:spcAft>
+            </a:pPr>
+            <a:r>
+              <a:rPr sz="1500">
+                <a:solidFill>
+                  <a:srgbClr val="22282E"/>
+                </a:solidFill>
+              </a:rPr>
+              <a:t>•  CBC sin autenticación — Vulnerable a padding oracle; usa AEAD</a:t>
+            </a:r>
+          </a:p>
+          <a:p>
+            <a:pPr>
+              <a:spcAft>
+                <a:spcPts val="600"/>
+              </a:spcAft>
+            </a:pPr>
+            <a:r>
+              <a:rPr sz="1500">
+                <a:solidFill>
+                  <a:srgbClr val="22282E"/>
+                </a:solidFill>
+              </a:rPr>
+              <a:t>•  Logs que revelan la causa del fallo — Fuga; registra sin distinguir para el cliente</a:t>
+            </a:r>
+          </a:p>
+          <a:p>
+            <a:pPr>
+              <a:spcAft>
+                <a:spcPts val="600"/>
+              </a:spcAft>
+            </a:pPr>
+            <a:r>
+              <a:rPr sz="1500">
+                <a:solidFill>
+                  <a:srgbClr val="22282E"/>
+                </a:solidFill>
+              </a:rPr>
+              <a:t>•  Descifrar antes de verificar integridad — Procesas datos manipulables; verifica primero</a:t>
+            </a:r>
+          </a:p>
+        </p:txBody>
+      </p:sp>
+    </p:spTree>
+  </p:cSld>
+  <p:clrMapOvr>
+    <a:masterClrMapping/>
+  </p:clrMapOvr>
+</p:sld>
+</file>
+
+<file path=ppt/slides/slide13.xml><?xml version="1.0" encoding="utf-8"?>
+<p:sld xmlns:a="http://schemas.openxmlformats.org/drawingml/2006/main" xmlns:p="http://schemas.openxmlformats.org/presentationml/2006/main" xmlns:r="http://schemas.openxmlformats.org/officeDocument/2006/relationships">
+  <p:cSld>
+    <p:spTree>
+      <p:nvGrpSpPr>
+        <p:cNvPr id="1" name=""/>
+        <p:cNvGrpSpPr/>
+        <p:nvPr/>
+      </p:nvGrpSpPr>
+      <p:grpSpPr/>
+      <p:sp>
+        <p:nvSpPr>
+          <p:cNvPr id="2" name="TextBox 1"/>
+          <p:cNvSpPr txBox="1"/>
+          <p:nvPr/>
+        </p:nvSpPr>
+        <p:spPr>
+          <a:xfrm>
+            <a:off x="457200" y="320040"/>
+            <a:ext cx="8229600" cy="822960"/>
+          </a:xfrm>
+          <a:prstGeom prst="rect">
+            <a:avLst/>
+          </a:prstGeom>
+          <a:noFill/>
+        </p:spPr>
+        <p:txBody>
+          <a:bodyPr wrap="square">
+            <a:spAutoFit/>
+          </a:bodyPr>
+          <a:lstStyle/>
+          <a:p>
+            <a:r>
+              <a:rPr sz="2600" b="1">
+                <a:solidFill>
+                  <a:srgbClr val="0B3D2E"/>
+                </a:solidFill>
+              </a:rPr>
+              <a:t>❓ Preguntas frecuentes</a:t>
+            </a:r>
+          </a:p>
+        </p:txBody>
+      </p:sp>
+      <p:sp>
+        <p:nvSpPr>
+          <p:cNvPr id="3" name="TextBox 2"/>
+          <p:cNvSpPr txBox="1"/>
+          <p:nvPr/>
+        </p:nvSpPr>
+        <p:spPr>
+          <a:xfrm>
+            <a:off x="457200" y="1280160"/>
+            <a:ext cx="8229600" cy="4937760"/>
+          </a:xfrm>
+          <a:prstGeom prst="rect">
+            <a:avLst/>
+          </a:prstGeom>
+          <a:noFill/>
+        </p:spPr>
+        <p:txBody>
+          <a:bodyPr wrap="square">
+            <a:spAutoFit/>
+          </a:bodyPr>
+          <a:lstStyle/>
+          <a:p>
+            <a:pPr>
+              <a:spcAft>
+                <a:spcPts val="600"/>
+              </a:spcAft>
+            </a:pPr>
+            <a:r>
+              <a:rPr sz="1500">
+                <a:solidFill>
+                  <a:srgbClr val="22282E"/>
+                </a:solidFill>
+              </a:rPr>
+              <a:t>•  ❓ ¿Basta con "esconder" los mensajes de error?</a:t>
+            </a:r>
+          </a:p>
+          <a:p>
+            <a:pPr>
+              <a:spcAft>
+                <a:spcPts val="600"/>
+              </a:spcAft>
+            </a:pPr>
+            <a:r>
+              <a:rPr sz="1500">
+                <a:solidFill>
+                  <a:srgbClr val="22282E"/>
+                </a:solidFill>
+              </a:rPr>
+              <a:t>•  No; el timing u otros canales siguen filtrando. La solución real es AEAD y tiempo constante, no ocultar síntomas.</a:t>
+            </a:r>
+          </a:p>
+          <a:p>
+            <a:pPr>
+              <a:spcAft>
+                <a:spcPts val="600"/>
+              </a:spcAft>
+            </a:pPr>
+            <a:r>
+              <a:rPr sz="1500">
+                <a:solidFill>
+                  <a:srgbClr val="22282E"/>
+                </a:solidFill>
+              </a:rPr>
+              <a:t>•  ❓ ¿Por qué AEAD elimina el padding oracle?</a:t>
+            </a:r>
+          </a:p>
+          <a:p>
+            <a:pPr>
+              <a:spcAft>
+                <a:spcPts val="600"/>
+              </a:spcAft>
+            </a:pPr>
+            <a:r>
+              <a:rPr sz="1500">
+                <a:solidFill>
+                  <a:srgbClr val="22282E"/>
+                </a:solidFill>
+              </a:rPr>
+              <a:t>•  Porque verifica el tag antes de tocar el padding y falla de forma uniforme, sin revelar validez de relleno.</a:t>
+            </a:r>
+          </a:p>
+          <a:p>
+            <a:pPr>
+              <a:spcAft>
+                <a:spcPts val="600"/>
+              </a:spcAft>
+            </a:pPr>
+            <a:r>
+              <a:rPr sz="1500">
+                <a:solidFill>
+                  <a:srgbClr val="22282E"/>
+                </a:solidFill>
+              </a:rPr>
+              <a:t>•  ❓ ¿Los ataques de timing son realistas por red?</a:t>
+            </a:r>
+          </a:p>
+          <a:p>
+            <a:pPr>
+              <a:spcAft>
+                <a:spcPts val="600"/>
+              </a:spcAft>
+            </a:pPr>
+            <a:r>
+              <a:rPr sz="1500">
+                <a:solidFill>
+                  <a:srgbClr val="22282E"/>
+                </a:solidFill>
+              </a:rPr>
+              <a:t>•  Sí; con suficientes mediciones y estadística se explotan incluso a través de la red (Lucky 13 lo demostró).</a:t>
+            </a:r>
+          </a:p>
+        </p:txBody>
+      </p:sp>
+    </p:spTree>
+  </p:cSld>
+  <p:clrMapOvr>
+    <a:masterClrMapping/>
+  </p:clrMapOvr>
+</p:sld>
+</file>
+
+<file path=ppt/slides/slide14.xml><?xml version="1.0" encoding="utf-8"?>
+<p:sld xmlns:a="http://schemas.openxmlformats.org/drawingml/2006/main" xmlns:p="http://schemas.openxmlformats.org/presentationml/2006/main" xmlns:r="http://schemas.openxmlformats.org/officeDocument/2006/relationships">
+  <p:cSld>
+    <p:spTree>
+      <p:nvGrpSpPr>
+        <p:cNvPr id="1" name=""/>
+        <p:cNvGrpSpPr/>
+        <p:nvPr/>
+      </p:nvGrpSpPr>
+      <p:grpSpPr/>
+      <p:sp>
+        <p:nvSpPr>
+          <p:cNvPr id="2" name="TextBox 1"/>
+          <p:cNvSpPr txBox="1"/>
+          <p:nvPr/>
+        </p:nvSpPr>
+        <p:spPr>
+          <a:xfrm>
+            <a:off x="457200" y="320040"/>
+            <a:ext cx="8229600" cy="822960"/>
+          </a:xfrm>
+          <a:prstGeom prst="rect">
+            <a:avLst/>
+          </a:prstGeom>
+          <a:noFill/>
+        </p:spPr>
+        <p:txBody>
+          <a:bodyPr wrap="square">
+            <a:spAutoFit/>
+          </a:bodyPr>
+          <a:lstStyle/>
+          <a:p>
+            <a:r>
+              <a:rPr sz="2600" b="1">
+                <a:solidFill>
+                  <a:srgbClr val="0B3D2E"/>
+                </a:solidFill>
+              </a:rPr>
+              <a:t>🔗 Referencias</a:t>
+            </a:r>
+          </a:p>
+        </p:txBody>
+      </p:sp>
+      <p:sp>
+        <p:nvSpPr>
+          <p:cNvPr id="3" name="TextBox 2"/>
+          <p:cNvSpPr txBox="1"/>
+          <p:nvPr/>
+        </p:nvSpPr>
+        <p:spPr>
+          <a:xfrm>
+            <a:off x="457200" y="1280160"/>
+            <a:ext cx="8229600" cy="4937760"/>
+          </a:xfrm>
+          <a:prstGeom prst="rect">
+            <a:avLst/>
+          </a:prstGeom>
+          <a:noFill/>
+        </p:spPr>
+        <p:txBody>
+          <a:bodyPr wrap="square">
+            <a:spAutoFit/>
+          </a:bodyPr>
+          <a:lstStyle/>
+          <a:p>
+            <a:pPr>
+              <a:spcAft>
+                <a:spcPts val="600"/>
+              </a:spcAft>
+            </a:pPr>
+            <a:r>
+              <a:rPr sz="1500">
+                <a:solidFill>
+                  <a:srgbClr val="22282E"/>
+                </a:solidFill>
+              </a:rPr>
               <a:t>•  Vaudenay, "Security Flaws Induced by CBC Padding" (padding oracle original).</a:t>
             </a:r>
           </a:p>
@@ -3599,6 +3855,81 @@
           </a:p>
         </p:txBody>
       </p:sp>
+    </p:spTree>
+  </p:cSld>
+  <p:clrMapOvr>
+    <a:masterClrMapping/>
+  </p:clrMapOvr>
+</p:sld>
+</file>
+
+<file path=ppt/slides/slide15.xml><?xml version="1.0" encoding="utf-8"?>
+<p:sld xmlns:a="http://schemas.openxmlformats.org/drawingml/2006/main" xmlns:p="http://schemas.openxmlformats.org/presentationml/2006/main" xmlns:r="http://schemas.openxmlformats.org/officeDocument/2006/relationships">
+  <p:cSld>
+    <p:spTree>
+      <p:nvGrpSpPr>
+        <p:cNvPr id="1" name=""/>
+        <p:cNvGrpSpPr/>
+        <p:nvPr/>
+      </p:nvGrpSpPr>
+      <p:grpSpPr/>
+      <p:sp>
+        <p:nvSpPr>
+          <p:cNvPr id="2" name="TextBox 1"/>
+          <p:cNvSpPr txBox="1"/>
+          <p:nvPr/>
+        </p:nvSpPr>
+        <p:spPr>
+          <a:xfrm>
+            <a:off x="457200" y="274320"/>
+            <a:ext cx="8229600" cy="640080"/>
+          </a:xfrm>
+          <a:prstGeom prst="rect">
+            <a:avLst/>
+          </a:prstGeom>
+          <a:noFill/>
+        </p:spPr>
+        <p:txBody>
+          <a:bodyPr wrap="square">
+            <a:spAutoFit/>
+          </a:bodyPr>
+          <a:lstStyle/>
+          <a:p>
+            <a:r>
+              <a:rPr sz="2200" b="1">
+                <a:solidFill>
+                  <a:srgbClr val="0B3D2E"/>
+                </a:solidFill>
+              </a:rPr>
+              <a:t>Diagrama de la clase</a:t>
+            </a:r>
+          </a:p>
+        </p:txBody>
+      </p:sp>
+      <p:pic>
+        <p:nvPicPr>
+          <p:cNvPr id="3" name="Picture 2" descr="9dc5f61576b7d095.png"/>
+          <p:cNvPicPr>
+            <a:picLocks noChangeAspect="1"/>
+          </p:cNvPicPr>
+          <p:nvPr/>
+        </p:nvPicPr>
+        <p:blipFill>
+          <a:blip r:embed="rId2"/>
+          <a:stretch>
+            <a:fillRect/>
+          </a:stretch>
+        </p:blipFill>
+        <p:spPr>
+          <a:xfrm>
+            <a:off x="1706840" y="1097280"/>
+            <a:ext cx="5730320" cy="5303520"/>
+          </a:xfrm>
+          <a:prstGeom prst="rect">
+            <a:avLst/>
+          </a:prstGeom>
+        </p:spPr>
+      </p:pic>
     </p:spTree>
   </p:cSld>
   <p:clrMapOvr>
@@ -3683,7 +4014,7 @@
                   <a:srgbClr val="22282E"/>
                 </a:solidFill>
               </a:rPr>
-              <a:t>•  Entender que la mayoría de los sistemas criptográficos no se rompen atacando el algoritmo, sino explotando su implementación. El alumno estudiará dos familias emblemáticas: el ataque de padding oracle (descifrar sin la clave abusando de mensajes de error de padding en CBC) y los ataques de canal lateral por tiempo (deducir secretos midiendo cuánto tarda una operación). Ambos se practican solo en un servicio de laboratorio propio.</a:t>
+              <a:t>•  Entender que la mayoría de los sistemas criptográficos no se rompen atacando el algoritmo, sino explotando su implementación. El alumno estudiará dos familias emblemáticas: el ataque de padding…</a:t>
             </a:r>
           </a:p>
         </p:txBody>
@@ -4077,7 +4408,7 @@
                   <a:srgbClr val="0B3D2E"/>
                 </a:solidFill>
               </a:rPr>
-              <a:t>📖 Definiciones y características</a:t>
+              <a:t>🧠 Explicación en profundidad</a:t>
             </a:r>
           </a:p>
         </p:txBody>
@@ -4115,97 +4446,97 @@
                   <a:srgbClr val="22282E"/>
                 </a:solidFill>
               </a:rPr>
-              <a:t>•  Canal lateral (side-channel): fuga de información por medios ajenos al algoritmo (tiempo, energía, errores). Característica: rompe cripto teóricamente segura.</a:t>
-            </a:r>
-          </a:p>
-          <a:p>
-            <a:pPr>
-              <a:spcAft>
-                <a:spcPts val="600"/>
-              </a:spcAft>
-            </a:pPr>
-            <a:r>
-              <a:rPr sz="1500">
-                <a:solidFill>
-                  <a:srgbClr val="22282E"/>
-                </a:solidFill>
-              </a:rPr>
-              <a:t>•  Padding oracle: servicio que revela (por error o comportamiento) si el padding de un texto descifrado es válido, permitiendo recuperar el plano.</a:t>
-            </a:r>
-          </a:p>
-          <a:p>
-            <a:pPr>
-              <a:spcAft>
-                <a:spcPts val="600"/>
-              </a:spcAft>
-            </a:pPr>
-            <a:r>
-              <a:rPr sz="1500">
-                <a:solidFill>
-                  <a:srgbClr val="22282E"/>
-                </a:solidFill>
-              </a:rPr>
-              <a:t>•  PKCS#7: esquema de relleno en CBC; su verificación distinta de otros errores crea el oráculo.</a:t>
-            </a:r>
-          </a:p>
-          <a:p>
-            <a:pPr>
-              <a:spcAft>
-                <a:spcPts val="600"/>
-              </a:spcAft>
-            </a:pPr>
-            <a:r>
-              <a:rPr sz="1500">
-                <a:solidFill>
-                  <a:srgbClr val="22282E"/>
-                </a:solidFill>
-              </a:rPr>
-              <a:t>•  Ataque de timing: se infiere un secreto midiendo diferencias de tiempo de ejecución (p. ej. comparación con salida temprana).</a:t>
-            </a:r>
-          </a:p>
-          <a:p>
-            <a:pPr>
-              <a:spcAft>
-                <a:spcPts val="600"/>
-              </a:spcAft>
-            </a:pPr>
-            <a:r>
-              <a:rPr sz="1500">
-                <a:solidFill>
-                  <a:srgbClr val="22282E"/>
-                </a:solidFill>
-              </a:rPr>
-              <a:t>•  Tiempo constante: código cuyo tiempo no depende de datos secretos; imprescindible en comparaciones y operaciones con claves.</a:t>
-            </a:r>
-          </a:p>
-          <a:p>
-            <a:pPr>
-              <a:spcAft>
-                <a:spcPts val="600"/>
-              </a:spcAft>
-            </a:pPr>
-            <a:r>
-              <a:rPr sz="1500">
-                <a:solidFill>
-                  <a:srgbClr val="22282E"/>
-                </a:solidFill>
-              </a:rPr>
-              <a:t>•  Fallar cerrado: rechazar sin distinguir causas ni entregar datos parciales.</a:t>
-            </a:r>
-          </a:p>
-          <a:p>
-            <a:pPr>
-              <a:spcAft>
-                <a:spcPts val="600"/>
-              </a:spcAft>
-            </a:pPr>
-            <a:r>
-              <a:rPr sz="1500">
-                <a:solidFill>
-                  <a:srgbClr val="22282E"/>
-                </a:solidFill>
-              </a:rPr>
-              <a:t>•  Lucky 13 / POODLE: ataques reales que explotaron padding y timing en TLS/CBC.</a:t>
+              <a:t>•  Nadie ha roto AES. Sin embargo, se descifran mensajes protegidos con AES continuamente, y</a:t>
+            </a:r>
+          </a:p>
+          <a:p>
+            <a:pPr>
+              <a:spcAft>
+                <a:spcPts val="600"/>
+              </a:spcAft>
+            </a:pPr>
+            <a:r>
+              <a:rPr sz="1500">
+                <a:solidFill>
+                  <a:srgbClr val="22282E"/>
+                </a:solidFill>
+              </a:rPr>
+              <a:t>•  la razón es que un sistema criptográfico no es solo un algoritmo: es también el código que</a:t>
+            </a:r>
+          </a:p>
+          <a:p>
+            <a:pPr>
+              <a:spcAft>
+                <a:spcPts val="600"/>
+              </a:spcAft>
+            </a:pPr>
+            <a:r>
+              <a:rPr sz="1500">
+                <a:solidFill>
+                  <a:srgbClr val="22282E"/>
+                </a:solidFill>
+              </a:rPr>
+              <a:t>•  lo ejecuta, los mensajes de error que devuelve y el tiempo que tarda en devolverlos. Un</a:t>
+            </a:r>
+          </a:p>
+          <a:p>
+            <a:pPr>
+              <a:spcAft>
+                <a:spcPts val="600"/>
+              </a:spcAft>
+            </a:pPr>
+            <a:r>
+              <a:rPr sz="1500">
+                <a:solidFill>
+                  <a:srgbClr val="22282E"/>
+                </a:solidFill>
+              </a:rPr>
+              <a:t>•  canal lateral es cualquier información que se filtra por esos aspectos no previstos en</a:t>
+            </a:r>
+          </a:p>
+          <a:p>
+            <a:pPr>
+              <a:spcAft>
+                <a:spcPts val="600"/>
+              </a:spcAft>
+            </a:pPr>
+            <a:r>
+              <a:rPr sz="1500">
+                <a:solidFill>
+                  <a:srgbClr val="22282E"/>
+                </a:solidFill>
+              </a:rPr>
+              <a:t>•  el modelo matemático —tiempo, consumo eléctrico, comportamiento de la caché, radiación</a:t>
+            </a:r>
+          </a:p>
+          <a:p>
+            <a:pPr>
+              <a:spcAft>
+                <a:spcPts val="600"/>
+              </a:spcAft>
+            </a:pPr>
+            <a:r>
+              <a:rPr sz="1500">
+                <a:solidFill>
+                  <a:srgbClr val="22282E"/>
+                </a:solidFill>
+              </a:rPr>
+              <a:t>•  electromagnética, o simplemente un mensaje de error distinto—. Esta clase enseña a verlos,</a:t>
+            </a:r>
+          </a:p>
+          <a:p>
+            <a:pPr>
+              <a:spcAft>
+                <a:spcPts val="600"/>
+              </a:spcAft>
+            </a:pPr>
+            <a:r>
+              <a:rPr sz="1500">
+                <a:solidFill>
+                  <a:srgbClr val="22282E"/>
+                </a:solidFill>
+              </a:rPr>
+              <a:t>•  y es la más importante de la parte para escribir código real.</a:t>
             </a:r>
           </a:p>
         </p:txBody>
@@ -4256,7 +4587,7 @@
                   <a:srgbClr val="0B3D2E"/>
                 </a:solidFill>
               </a:rPr>
-              <a:t>🧰 Herramientas y preparación</a:t>
+              <a:t>📖 Definiciones y características</a:t>
             </a:r>
           </a:p>
         </p:txBody>
@@ -4294,22 +4625,97 @@
                   <a:srgbClr val="22282E"/>
                 </a:solidFill>
               </a:rPr>
-              <a:t>•  pip install cryptography flask requests</a:t>
-            </a:r>
-          </a:p>
-          <a:p>
-            <a:pPr>
-              <a:spcAft>
-                <a:spcPts val="600"/>
-              </a:spcAft>
-            </a:pPr>
-            <a:r>
-              <a:rPr sz="1500">
-                <a:solidFill>
-                  <a:srgbClr val="22282E"/>
-                </a:solidFill>
-              </a:rPr>
-              <a:t>•  Monta el oráculo en localhost. No apuntes las herramientas a ningún host externo.</a:t>
+              <a:t>•  Canal lateral (side-channel): fuga de información por medios ajenos al algoritmo (tiempo, energía, errores). Característica: rompe cripto teóricamente segura.</a:t>
+            </a:r>
+          </a:p>
+          <a:p>
+            <a:pPr>
+              <a:spcAft>
+                <a:spcPts val="600"/>
+              </a:spcAft>
+            </a:pPr>
+            <a:r>
+              <a:rPr sz="1500">
+                <a:solidFill>
+                  <a:srgbClr val="22282E"/>
+                </a:solidFill>
+              </a:rPr>
+              <a:t>•  Padding oracle: servicio que revela (por error o comportamiento) si el padding de un texto descifrado es válido, permitiendo recuperar el plano.</a:t>
+            </a:r>
+          </a:p>
+          <a:p>
+            <a:pPr>
+              <a:spcAft>
+                <a:spcPts val="600"/>
+              </a:spcAft>
+            </a:pPr>
+            <a:r>
+              <a:rPr sz="1500">
+                <a:solidFill>
+                  <a:srgbClr val="22282E"/>
+                </a:solidFill>
+              </a:rPr>
+              <a:t>•  PKCS#7: esquema de relleno en CBC; su verificación distinta de otros errores crea el oráculo.</a:t>
+            </a:r>
+          </a:p>
+          <a:p>
+            <a:pPr>
+              <a:spcAft>
+                <a:spcPts val="600"/>
+              </a:spcAft>
+            </a:pPr>
+            <a:r>
+              <a:rPr sz="1500">
+                <a:solidFill>
+                  <a:srgbClr val="22282E"/>
+                </a:solidFill>
+              </a:rPr>
+              <a:t>•  Ataque de timing: se infiere un secreto midiendo diferencias de tiempo de ejecución (p. ej. comparación con salida temprana).</a:t>
+            </a:r>
+          </a:p>
+          <a:p>
+            <a:pPr>
+              <a:spcAft>
+                <a:spcPts val="600"/>
+              </a:spcAft>
+            </a:pPr>
+            <a:r>
+              <a:rPr sz="1500">
+                <a:solidFill>
+                  <a:srgbClr val="22282E"/>
+                </a:solidFill>
+              </a:rPr>
+              <a:t>•  Tiempo constante: código cuyo tiempo no depende de datos secretos; imprescindible en comparaciones y operaciones con claves.</a:t>
+            </a:r>
+          </a:p>
+          <a:p>
+            <a:pPr>
+              <a:spcAft>
+                <a:spcPts val="600"/>
+              </a:spcAft>
+            </a:pPr>
+            <a:r>
+              <a:rPr sz="1500">
+                <a:solidFill>
+                  <a:srgbClr val="22282E"/>
+                </a:solidFill>
+              </a:rPr>
+              <a:t>•  Fallar cerrado: rechazar sin distinguir causas ni entregar datos parciales.</a:t>
+            </a:r>
+          </a:p>
+          <a:p>
+            <a:pPr>
+              <a:spcAft>
+                <a:spcPts val="600"/>
+              </a:spcAft>
+            </a:pPr>
+            <a:r>
+              <a:rPr sz="1500">
+                <a:solidFill>
+                  <a:srgbClr val="22282E"/>
+                </a:solidFill>
+              </a:rPr>
+              <a:t>•  Lucky 13 / POODLE: ataques reales que explotaron padding y timing en TLS/CBC.</a:t>
             </a:r>
           </a:p>
         </p:txBody>
@@ -4360,7 +4766,7 @@
                   <a:srgbClr val="0B3D2E"/>
                 </a:solidFill>
               </a:rPr>
-              <a:t>🧪 Laboratorio guiado</a:t>
+              <a:t>📔 Glosario</a:t>
             </a:r>
           </a:p>
         </p:txBody>
@@ -4398,67 +4804,97 @@
                   <a:srgbClr val="22282E"/>
                 </a:solidFill>
               </a:rPr>
-              <a:t>•  Monta un oráculo vulnerable (laboratorio propio). Un pequeño servicio Flask descifra AES-CBC y responde "padding OK" o "padding inválido". Ese comportamiento distinguible es el oráculo.</a:t>
-            </a:r>
-          </a:p>
-          <a:p>
-            <a:pPr>
-              <a:spcAft>
-                <a:spcPts val="600"/>
-              </a:spcAft>
-            </a:pPr>
-            <a:r>
-              <a:rPr sz="1500">
-                <a:solidFill>
-                  <a:srgbClr val="22282E"/>
-                </a:solidFill>
-              </a:rPr>
-              <a:t>•  Ataque de padding oracle. Implementa el ataque clásico: para cada bloque, manipula el bloque previo byte a byte hasta que el oráculo indique padding válido; despeja el "intermediate value" y recupera el texto plano. Recupera un mensaje completo sin conocer la clave.</a:t>
-            </a:r>
-          </a:p>
-          <a:p>
-            <a:pPr>
-              <a:spcAft>
-                <a:spcPts val="600"/>
-              </a:spcAft>
-            </a:pPr>
-            <a:r>
-              <a:rPr sz="1500">
-                <a:solidFill>
-                  <a:srgbClr val="22282E"/>
-                </a:solidFill>
-              </a:rPr>
-              <a:t>•  Mitígalo con AEAD. Reescribe el servicio con AES-GCM: ahora cualquier manipulación falla con InvalidTag de forma uniforme y el ataque deja de funcionar.</a:t>
-            </a:r>
-          </a:p>
-          <a:p>
-            <a:pPr>
-              <a:spcAft>
-                <a:spcPts val="600"/>
-              </a:spcAft>
-            </a:pPr>
-            <a:r>
-              <a:rPr sz="1500">
-                <a:solidFill>
-                  <a:srgbClr val="22282E"/>
-                </a:solidFill>
-              </a:rPr>
-              <a:t>•  Timing en comparación de tokens. Implementa una comparación byte a byte con salida temprana y mide (con muchas repeticiones) que un token con más prefijo correcto tarda un poco más. Sustitúyela por hmac.comparedigest y comprueba que la diferencia desaparece.</a:t>
-            </a:r>
-          </a:p>
-          <a:p>
-            <a:pPr>
-              <a:spcAft>
-                <a:spcPts val="600"/>
-              </a:spcAft>
-            </a:pPr>
-            <a:r>
-              <a:rPr sz="1500">
-                <a:solidFill>
-                  <a:srgbClr val="22282E"/>
-                </a:solidFill>
-              </a:rPr>
-              <a:t>•  Documenta las mitigaciones: AEAD, errores uniformes, comparación constante, y no exponer distinciones de fallo.</a:t>
+              <a:t>•  Término — Definición concisa</a:t>
+            </a:r>
+          </a:p>
+          <a:p>
+            <a:pPr>
+              <a:spcAft>
+                <a:spcPts val="600"/>
+              </a:spcAft>
+            </a:pPr>
+            <a:r>
+              <a:rPr sz="1500">
+                <a:solidFill>
+                  <a:srgbClr val="22282E"/>
+                </a:solidFill>
+              </a:rPr>
+              <a:t>•  Canal lateral — Fuga por tiempo, consumo, caché o mensajes de error</a:t>
+            </a:r>
+          </a:p>
+          <a:p>
+            <a:pPr>
+              <a:spcAft>
+                <a:spcPts val="600"/>
+              </a:spcAft>
+            </a:pPr>
+            <a:r>
+              <a:rPr sz="1500">
+                <a:solidFill>
+                  <a:srgbClr val="22282E"/>
+                </a:solidFill>
+              </a:rPr>
+              <a:t>•  Oráculo — Cualquier respuesta del sistema que revele algo sobre el secreto</a:t>
+            </a:r>
+          </a:p>
+          <a:p>
+            <a:pPr>
+              <a:spcAft>
+                <a:spcPts val="600"/>
+              </a:spcAft>
+            </a:pPr>
+            <a:r>
+              <a:rPr sz="1500">
+                <a:solidFill>
+                  <a:srgbClr val="22282E"/>
+                </a:solidFill>
+              </a:rPr>
+              <a:t>•  Padding oracle — Oráculo que revela si el relleno era válido; descifra sin clave</a:t>
+            </a:r>
+          </a:p>
+          <a:p>
+            <a:pPr>
+              <a:spcAft>
+                <a:spcPts val="600"/>
+              </a:spcAft>
+            </a:pPr>
+            <a:r>
+              <a:rPr sz="1500">
+                <a:solidFill>
+                  <a:srgbClr val="22282E"/>
+                </a:solidFill>
+              </a:rPr>
+              <a:t>•  PKCS#7 — Relleno cuya validez se puede comprobar y por tanto filtrar</a:t>
+            </a:r>
+          </a:p>
+          <a:p>
+            <a:pPr>
+              <a:spcAft>
+                <a:spcPts val="600"/>
+              </a:spcAft>
+            </a:pPr>
+            <a:r>
+              <a:rPr sz="1500">
+                <a:solidFill>
+                  <a:srgbClr val="22282E"/>
+                </a:solidFill>
+              </a:rPr>
+              <a:t>•  Vaudenay (2002) — Descripción original del ataque de padding oracle</a:t>
+            </a:r>
+          </a:p>
+          <a:p>
+            <a:pPr>
+              <a:spcAft>
+                <a:spcPts val="600"/>
+              </a:spcAft>
+            </a:pPr>
+            <a:r>
+              <a:rPr sz="1500">
+                <a:solidFill>
+                  <a:srgbClr val="22282E"/>
+                </a:solidFill>
+              </a:rPr>
+              <a:t>•  Ataque de timing — Explota que el tiempo dependa de datos secretos</a:t>
             </a:r>
           </a:p>
         </p:txBody>
@@ -4509,7 +4945,7 @@
                   <a:srgbClr val="0B3D2E"/>
                 </a:solidFill>
               </a:rPr>
-              <a:t>✍️ Ejercicios</a:t>
+              <a:t>🧰 Herramientas y preparación</a:t>
             </a:r>
           </a:p>
         </p:txBody>
@@ -4547,82 +4983,7 @@
                   <a:srgbClr val="22282E"/>
                 </a:solidFill>
               </a:rPr>
-              <a:t>•  Explica por qué CBC + verificación de padding revela información.</a:t>
-            </a:r>
-          </a:p>
-          <a:p>
-            <a:pPr>
-              <a:spcAft>
-                <a:spcPts val="600"/>
-              </a:spcAft>
-            </a:pPr>
-            <a:r>
-              <a:rPr sz="1500">
-                <a:solidFill>
-                  <a:srgbClr val="22282E"/>
-                </a:solidFill>
-              </a:rPr>
-              <a:t>•  Recupera un bloque con el oráculo de tu laboratorio y describe cada paso.</a:t>
-            </a:r>
-          </a:p>
-          <a:p>
-            <a:pPr>
-              <a:spcAft>
-                <a:spcPts val="600"/>
-              </a:spcAft>
-            </a:pPr>
-            <a:r>
-              <a:rPr sz="1500">
-                <a:solidFill>
-                  <a:srgbClr val="22282E"/>
-                </a:solidFill>
-              </a:rPr>
-              <a:t>•  Demuestra empíricamente una diferencia de timing en una comparación ingenua.</a:t>
-            </a:r>
-          </a:p>
-          <a:p>
-            <a:pPr>
-              <a:spcAft>
-                <a:spcPts val="600"/>
-              </a:spcAft>
-            </a:pPr>
-            <a:r>
-              <a:rPr sz="1500">
-                <a:solidFill>
-                  <a:srgbClr val="22282E"/>
-                </a:solidFill>
-              </a:rPr>
-              <a:t>•  Reescribe el servicio con AEAD y verifica que el ataque falla.</a:t>
-            </a:r>
-          </a:p>
-          <a:p>
-            <a:pPr>
-              <a:spcAft>
-                <a:spcPts val="600"/>
-              </a:spcAft>
-            </a:pPr>
-            <a:r>
-              <a:rPr sz="1500">
-                <a:solidFill>
-                  <a:srgbClr val="22282E"/>
-                </a:solidFill>
-              </a:rPr>
-              <a:t>•  Investiga cómo Lucky 13 explotó timing en el MAC de TLS-CBC.</a:t>
-            </a:r>
-          </a:p>
-          <a:p>
-            <a:pPr>
-              <a:spcAft>
-                <a:spcPts val="600"/>
-              </a:spcAft>
-            </a:pPr>
-            <a:r>
-              <a:rPr sz="1500">
-                <a:solidFill>
-                  <a:srgbClr val="22282E"/>
-                </a:solidFill>
-              </a:rPr>
-              <a:t>•  Propón cómo unificar mensajes de error para no filtrar la causa.</a:t>
+              <a:t>•  Monta el oráculo en localhost. No apuntes las herramientas a ningún host externo.</a:t>
             </a:r>
           </a:p>
         </p:txBody>
@@ -4673,7 +5034,7 @@
                   <a:srgbClr val="0B3D2E"/>
                 </a:solidFill>
               </a:rPr>
-              <a:t>📝 Reto verificable</a:t>
+              <a:t>🧪 Laboratorio guiado</a:t>
             </a:r>
           </a:p>
         </p:txBody>
@@ -4711,7 +5072,67 @@
                   <a:srgbClr val="22282E"/>
                 </a:solidFill>
               </a:rPr>
-              <a:t>•  Toma un oráculo de padding de laboratorio y recupera un texto plano completo sin la clave; luego aplica una mitigación (migrar a AEAD) y demuestra que el mismo ataque ya no recupera nada. Criterio de aceptación: entregas el texto plano recuperado en la versión vulnerable y muestras que, tras migrar a AES-GCM, el atacante solo obtiene InvalidTag sin información útil.</a:t>
+              <a:t>•  Monta un oráculo vulnerable (laboratorio propio). Un pequeño servicio Flask descifra AES-CBC y responde "padding OK" o "padding inválido". Ese comportamiento distinguible es el oráculo.</a:t>
+            </a:r>
+          </a:p>
+          <a:p>
+            <a:pPr>
+              <a:spcAft>
+                <a:spcPts val="600"/>
+              </a:spcAft>
+            </a:pPr>
+            <a:r>
+              <a:rPr sz="1500">
+                <a:solidFill>
+                  <a:srgbClr val="22282E"/>
+                </a:solidFill>
+              </a:rPr>
+              <a:t>•  Ataque de padding oracle. Implementa el ataque clásico: para cada bloque, manipula el bloque previo byte a byte hasta que el oráculo indique padding válido; despeja el "intermediate value" y recupera…</a:t>
+            </a:r>
+          </a:p>
+          <a:p>
+            <a:pPr>
+              <a:spcAft>
+                <a:spcPts val="600"/>
+              </a:spcAft>
+            </a:pPr>
+            <a:r>
+              <a:rPr sz="1500">
+                <a:solidFill>
+                  <a:srgbClr val="22282E"/>
+                </a:solidFill>
+              </a:rPr>
+              <a:t>•  Mitígalo con AEAD. Reescribe el servicio con AES-GCM: ahora cualquier manipulación falla con InvalidTag de forma uniforme y el ataque deja de funcionar.</a:t>
+            </a:r>
+          </a:p>
+          <a:p>
+            <a:pPr>
+              <a:spcAft>
+                <a:spcPts val="600"/>
+              </a:spcAft>
+            </a:pPr>
+            <a:r>
+              <a:rPr sz="1500">
+                <a:solidFill>
+                  <a:srgbClr val="22282E"/>
+                </a:solidFill>
+              </a:rPr>
+              <a:t>•  Timing en comparación de tokens. Implementa una comparación byte a byte con salida temprana y mide (con muchas repeticiones) que un token con más prefijo correcto tarda un poco más. Sustitúyela por…</a:t>
+            </a:r>
+          </a:p>
+          <a:p>
+            <a:pPr>
+              <a:spcAft>
+                <a:spcPts val="600"/>
+              </a:spcAft>
+            </a:pPr>
+            <a:r>
+              <a:rPr sz="1500">
+                <a:solidFill>
+                  <a:srgbClr val="22282E"/>
+                </a:solidFill>
+              </a:rPr>
+              <a:t>•  Documenta las mitigaciones: AEAD, errores uniformes, comparación constante, y no exponer distinciones de fallo.</a:t>
             </a:r>
           </a:p>
         </p:txBody>
